--- a/output/wordlabs-ment-suffix-3day.pptx
+++ b/output/wordlabs-ment-suffix-3day.pptx
@@ -15972,11 +15972,11 @@
         <p:spPr>
           <a:xfrm>
             <a:off x="1874520" y="4096512"/>
-            <a:ext cx="6903720" cy="804672"/>
+            <a:ext cx="6903720" cy="658368"/>
           </a:xfrm>
           <a:prstGeom prst="rect">
             <a:avLst>
-              <a:gd name="adj" fmla="val 6818"/>
+              <a:gd name="adj" fmla="val 8333"/>
             </a:avLst>
           </a:prstGeom>
           <a:solidFill>
@@ -15998,12 +15998,12 @@
         </p:nvSpPr>
         <p:spPr>
           <a:xfrm>
-            <a:off x="1951330" y="4169664"/>
-            <a:ext cx="676656" cy="384048"/>
+            <a:off x="1952244" y="4169664"/>
+            <a:ext cx="543652" cy="475488"/>
           </a:xfrm>
           <a:prstGeom prst="rect">
             <a:avLst>
-              <a:gd name="adj" fmla="val 9524"/>
+              <a:gd name="adj" fmla="val 7692"/>
             </a:avLst>
           </a:prstGeom>
           <a:solidFill>
@@ -16025,8 +16025,8 @@
         </p:nvSpPr>
         <p:spPr>
           <a:xfrm>
-            <a:off x="1951330" y="4169664"/>
-            <a:ext cx="676656" cy="384048"/>
+            <a:off x="1952244" y="4169664"/>
+            <a:ext cx="543652" cy="475488"/>
           </a:xfrm>
           <a:prstGeom prst="rect">
             <a:avLst/>
@@ -16064,12 +16064,12 @@
         </p:nvSpPr>
         <p:spPr>
           <a:xfrm>
-            <a:off x="2677363" y="4169664"/>
-            <a:ext cx="676656" cy="384048"/>
+            <a:off x="2546188" y="4169664"/>
+            <a:ext cx="543652" cy="475488"/>
           </a:xfrm>
           <a:prstGeom prst="rect">
             <a:avLst>
-              <a:gd name="adj" fmla="val 9524"/>
+              <a:gd name="adj" fmla="val 7692"/>
             </a:avLst>
           </a:prstGeom>
           <a:solidFill>
@@ -16091,8 +16091,8 @@
         </p:nvSpPr>
         <p:spPr>
           <a:xfrm>
-            <a:off x="2677363" y="4169664"/>
-            <a:ext cx="676656" cy="384048"/>
+            <a:off x="2546188" y="4169664"/>
+            <a:ext cx="543652" cy="475488"/>
           </a:xfrm>
           <a:prstGeom prst="rect">
             <a:avLst/>
@@ -16130,12 +16130,12 @@
         </p:nvSpPr>
         <p:spPr>
           <a:xfrm>
-            <a:off x="3403397" y="4169664"/>
-            <a:ext cx="676656" cy="384048"/>
+            <a:off x="3140133" y="4169664"/>
+            <a:ext cx="543652" cy="475488"/>
           </a:xfrm>
           <a:prstGeom prst="rect">
             <a:avLst>
-              <a:gd name="adj" fmla="val 9524"/>
+              <a:gd name="adj" fmla="val 7692"/>
             </a:avLst>
           </a:prstGeom>
           <a:solidFill>
@@ -16157,8 +16157,8 @@
         </p:nvSpPr>
         <p:spPr>
           <a:xfrm>
-            <a:off x="3403397" y="4169664"/>
-            <a:ext cx="676656" cy="384048"/>
+            <a:off x="3140133" y="4169664"/>
+            <a:ext cx="543652" cy="475488"/>
           </a:xfrm>
           <a:prstGeom prst="rect">
             <a:avLst/>
@@ -16182,7 +16182,7 @@
                 <a:ea typeface="Trebuchet MS" pitchFamily="34" charset="-122"/>
                 <a:cs typeface="Trebuchet MS" pitchFamily="34" charset="-120"/>
               </a:rPr>
-              <a:t>pr</a:t>
+              <a:t>p</a:t>
             </a:r>
             <a:endParaRPr lang="en-US" sz="900" dirty="0"/>
           </a:p>
@@ -16196,12 +16196,12 @@
         </p:nvSpPr>
         <p:spPr>
           <a:xfrm>
-            <a:off x="4129430" y="4169664"/>
-            <a:ext cx="676656" cy="384048"/>
+            <a:off x="3734077" y="4169664"/>
+            <a:ext cx="543652" cy="475488"/>
           </a:xfrm>
           <a:prstGeom prst="rect">
             <a:avLst>
-              <a:gd name="adj" fmla="val 9524"/>
+              <a:gd name="adj" fmla="val 7692"/>
             </a:avLst>
           </a:prstGeom>
           <a:solidFill>
@@ -16223,8 +16223,8 @@
         </p:nvSpPr>
         <p:spPr>
           <a:xfrm>
-            <a:off x="4129430" y="4169664"/>
-            <a:ext cx="676656" cy="384048"/>
+            <a:off x="3734077" y="4169664"/>
+            <a:ext cx="543652" cy="475488"/>
           </a:xfrm>
           <a:prstGeom prst="rect">
             <a:avLst/>
@@ -16248,7 +16248,7 @@
                 <a:ea typeface="Trebuchet MS" pitchFamily="34" charset="-122"/>
                 <a:cs typeface="Trebuchet MS" pitchFamily="34" charset="-120"/>
               </a:rPr>
-              <a:t>oo</a:t>
+              <a:t>r</a:t>
             </a:r>
             <a:endParaRPr lang="en-US" sz="900" dirty="0"/>
           </a:p>
@@ -16256,57 +16256,18 @@
       </p:sp>
       <p:sp>
         <p:nvSpPr>
-          <p:cNvPr id="49" name="Text 47"/>
-          <p:cNvSpPr/>
-          <p:nvPr/>
-        </p:nvSpPr>
-        <p:spPr>
-          <a:xfrm>
-            <a:off x="4129430" y="4572000"/>
-            <a:ext cx="676656" cy="219456"/>
-          </a:xfrm>
-          <a:prstGeom prst="rect">
-            <a:avLst/>
-          </a:prstGeom>
-          <a:noFill/>
-          <a:ln/>
-        </p:spPr>
-        <p:txBody>
-          <a:bodyPr wrap="square" lIns="0" tIns="0" rIns="0" bIns="0" rtlCol="0" anchor="t"/>
-          <a:lstStyle/>
-          <a:p>
-            <a:pPr algn="ctr" indent="0" marL="0">
-              <a:buNone/>
-            </a:pPr>
-            <a:r>
-              <a:rPr lang="en-US" sz="750" i="1" dirty="0">
-                <a:solidFill>
-                  <a:srgbClr val="94A3B8"/>
-                </a:solidFill>
-                <a:latin typeface="Calibri" pitchFamily="34" charset="0"/>
-                <a:ea typeface="Calibri" pitchFamily="34" charset="-122"/>
-                <a:cs typeface="Calibri" pitchFamily="34" charset="-120"/>
-              </a:rPr>
-              <a:t>/oo/</a:t>
-            </a:r>
-            <a:endParaRPr lang="en-US" sz="750" dirty="0"/>
-          </a:p>
-        </p:txBody>
-      </p:sp>
-      <p:sp>
-        <p:nvSpPr>
-          <p:cNvPr id="50" name="Shape 48"/>
-          <p:cNvSpPr/>
-          <p:nvPr/>
-        </p:nvSpPr>
-        <p:spPr>
-          <a:xfrm>
-            <a:off x="4855464" y="4169664"/>
-            <a:ext cx="676656" cy="384048"/>
+          <p:cNvPr id="49" name="Shape 47"/>
+          <p:cNvSpPr/>
+          <p:nvPr/>
+        </p:nvSpPr>
+        <p:spPr>
+          <a:xfrm>
+            <a:off x="4328021" y="4169664"/>
+            <a:ext cx="543652" cy="475488"/>
           </a:xfrm>
           <a:prstGeom prst="rect">
             <a:avLst>
-              <a:gd name="adj" fmla="val 9524"/>
+              <a:gd name="adj" fmla="val 7692"/>
             </a:avLst>
           </a:prstGeom>
           <a:solidFill>
@@ -16322,14 +16283,14 @@
       </p:sp>
       <p:sp>
         <p:nvSpPr>
-          <p:cNvPr id="51" name="Text 49"/>
-          <p:cNvSpPr/>
-          <p:nvPr/>
-        </p:nvSpPr>
-        <p:spPr>
-          <a:xfrm>
-            <a:off x="4855464" y="4169664"/>
-            <a:ext cx="676656" cy="384048"/>
+          <p:cNvPr id="50" name="Text 48"/>
+          <p:cNvSpPr/>
+          <p:nvPr/>
+        </p:nvSpPr>
+        <p:spPr>
+          <a:xfrm>
+            <a:off x="4328021" y="4169664"/>
+            <a:ext cx="543652" cy="475488"/>
           </a:xfrm>
           <a:prstGeom prst="rect">
             <a:avLst/>
@@ -16353,7 +16314,7 @@
                 <a:ea typeface="Trebuchet MS" pitchFamily="34" charset="-122"/>
                 <a:cs typeface="Trebuchet MS" pitchFamily="34" charset="-120"/>
               </a:rPr>
-              <a:t>v</a:t>
+              <a:t>o</a:t>
             </a:r>
             <a:endParaRPr lang="en-US" sz="900" dirty="0"/>
           </a:p>
@@ -16361,18 +16322,18 @@
       </p:sp>
       <p:sp>
         <p:nvSpPr>
-          <p:cNvPr id="52" name="Shape 50"/>
-          <p:cNvSpPr/>
-          <p:nvPr/>
-        </p:nvSpPr>
-        <p:spPr>
-          <a:xfrm>
-            <a:off x="5581498" y="4169664"/>
-            <a:ext cx="676656" cy="384048"/>
+          <p:cNvPr id="51" name="Shape 49"/>
+          <p:cNvSpPr/>
+          <p:nvPr/>
+        </p:nvSpPr>
+        <p:spPr>
+          <a:xfrm>
+            <a:off x="4921966" y="4169664"/>
+            <a:ext cx="543652" cy="475488"/>
           </a:xfrm>
           <a:prstGeom prst="rect">
             <a:avLst>
-              <a:gd name="adj" fmla="val 9524"/>
+              <a:gd name="adj" fmla="val 7692"/>
             </a:avLst>
           </a:prstGeom>
           <a:solidFill>
@@ -16388,14 +16349,14 @@
       </p:sp>
       <p:sp>
         <p:nvSpPr>
-          <p:cNvPr id="53" name="Text 51"/>
-          <p:cNvSpPr/>
-          <p:nvPr/>
-        </p:nvSpPr>
-        <p:spPr>
-          <a:xfrm>
-            <a:off x="5581498" y="4169664"/>
-            <a:ext cx="676656" cy="384048"/>
+          <p:cNvPr id="52" name="Text 50"/>
+          <p:cNvSpPr/>
+          <p:nvPr/>
+        </p:nvSpPr>
+        <p:spPr>
+          <a:xfrm>
+            <a:off x="4921966" y="4169664"/>
+            <a:ext cx="543652" cy="475488"/>
           </a:xfrm>
           <a:prstGeom prst="rect">
             <a:avLst/>
@@ -16419,7 +16380,7 @@
                 <a:ea typeface="Trebuchet MS" pitchFamily="34" charset="-122"/>
                 <a:cs typeface="Trebuchet MS" pitchFamily="34" charset="-120"/>
               </a:rPr>
-              <a:t>m</a:t>
+              <a:t>v</a:t>
             </a:r>
             <a:endParaRPr lang="en-US" sz="900" dirty="0"/>
           </a:p>
@@ -16427,18 +16388,18 @@
       </p:sp>
       <p:sp>
         <p:nvSpPr>
-          <p:cNvPr id="54" name="Shape 52"/>
-          <p:cNvSpPr/>
-          <p:nvPr/>
-        </p:nvSpPr>
-        <p:spPr>
-          <a:xfrm>
-            <a:off x="6307531" y="4169664"/>
-            <a:ext cx="676656" cy="384048"/>
+          <p:cNvPr id="53" name="Shape 51"/>
+          <p:cNvSpPr/>
+          <p:nvPr/>
+        </p:nvSpPr>
+        <p:spPr>
+          <a:xfrm>
+            <a:off x="5515910" y="4169664"/>
+            <a:ext cx="543652" cy="475488"/>
           </a:xfrm>
           <a:prstGeom prst="rect">
             <a:avLst>
-              <a:gd name="adj" fmla="val 9524"/>
+              <a:gd name="adj" fmla="val 7692"/>
             </a:avLst>
           </a:prstGeom>
           <a:solidFill>
@@ -16454,14 +16415,14 @@
       </p:sp>
       <p:sp>
         <p:nvSpPr>
-          <p:cNvPr id="55" name="Text 53"/>
-          <p:cNvSpPr/>
-          <p:nvPr/>
-        </p:nvSpPr>
-        <p:spPr>
-          <a:xfrm>
-            <a:off x="6307531" y="4169664"/>
-            <a:ext cx="676656" cy="384048"/>
+          <p:cNvPr id="54" name="Text 52"/>
+          <p:cNvSpPr/>
+          <p:nvPr/>
+        </p:nvSpPr>
+        <p:spPr>
+          <a:xfrm>
+            <a:off x="5515910" y="4169664"/>
+            <a:ext cx="543652" cy="475488"/>
           </a:xfrm>
           <a:prstGeom prst="rect">
             <a:avLst/>
@@ -16493,18 +16454,18 @@
       </p:sp>
       <p:sp>
         <p:nvSpPr>
-          <p:cNvPr id="56" name="Shape 54"/>
-          <p:cNvSpPr/>
-          <p:nvPr/>
-        </p:nvSpPr>
-        <p:spPr>
-          <a:xfrm>
-            <a:off x="7033565" y="4169664"/>
-            <a:ext cx="676656" cy="384048"/>
+          <p:cNvPr id="55" name="Shape 53"/>
+          <p:cNvSpPr/>
+          <p:nvPr/>
+        </p:nvSpPr>
+        <p:spPr>
+          <a:xfrm>
+            <a:off x="6109855" y="4169664"/>
+            <a:ext cx="543652" cy="475488"/>
           </a:xfrm>
           <a:prstGeom prst="rect">
             <a:avLst>
-              <a:gd name="adj" fmla="val 9524"/>
+              <a:gd name="adj" fmla="val 7692"/>
             </a:avLst>
           </a:prstGeom>
           <a:solidFill>
@@ -16520,14 +16481,14 @@
       </p:sp>
       <p:sp>
         <p:nvSpPr>
-          <p:cNvPr id="57" name="Text 55"/>
-          <p:cNvSpPr/>
-          <p:nvPr/>
-        </p:nvSpPr>
-        <p:spPr>
-          <a:xfrm>
-            <a:off x="7033565" y="4169664"/>
-            <a:ext cx="676656" cy="384048"/>
+          <p:cNvPr id="56" name="Text 54"/>
+          <p:cNvSpPr/>
+          <p:nvPr/>
+        </p:nvSpPr>
+        <p:spPr>
+          <a:xfrm>
+            <a:off x="6109855" y="4169664"/>
+            <a:ext cx="543652" cy="475488"/>
           </a:xfrm>
           <a:prstGeom prst="rect">
             <a:avLst/>
@@ -16551,6 +16512,138 @@
                 <a:ea typeface="Trebuchet MS" pitchFamily="34" charset="-122"/>
                 <a:cs typeface="Trebuchet MS" pitchFamily="34" charset="-120"/>
               </a:rPr>
+              <a:t>m</a:t>
+            </a:r>
+            <a:endParaRPr lang="en-US" sz="900" dirty="0"/>
+          </a:p>
+        </p:txBody>
+      </p:sp>
+      <p:sp>
+        <p:nvSpPr>
+          <p:cNvPr id="57" name="Shape 55"/>
+          <p:cNvSpPr/>
+          <p:nvPr/>
+        </p:nvSpPr>
+        <p:spPr>
+          <a:xfrm>
+            <a:off x="6703799" y="4169664"/>
+            <a:ext cx="543652" cy="475488"/>
+          </a:xfrm>
+          <a:prstGeom prst="rect">
+            <a:avLst>
+              <a:gd name="adj" fmla="val 7692"/>
+            </a:avLst>
+          </a:prstGeom>
+          <a:solidFill>
+            <a:srgbClr val="FFFFFF"/>
+          </a:solidFill>
+          <a:ln w="12700">
+            <a:solidFill>
+              <a:srgbClr val="DB2777"/>
+            </a:solidFill>
+            <a:prstDash val="solid"/>
+          </a:ln>
+        </p:spPr>
+      </p:sp>
+      <p:sp>
+        <p:nvSpPr>
+          <p:cNvPr id="58" name="Text 56"/>
+          <p:cNvSpPr/>
+          <p:nvPr/>
+        </p:nvSpPr>
+        <p:spPr>
+          <a:xfrm>
+            <a:off x="6703799" y="4169664"/>
+            <a:ext cx="543652" cy="475488"/>
+          </a:xfrm>
+          <a:prstGeom prst="rect">
+            <a:avLst/>
+          </a:prstGeom>
+          <a:noFill/>
+          <a:ln/>
+        </p:spPr>
+        <p:txBody>
+          <a:bodyPr wrap="square" lIns="0" tIns="0" rIns="0" bIns="0" rtlCol="0" anchor="ctr"/>
+          <a:lstStyle/>
+          <a:p>
+            <a:pPr algn="ctr" indent="0" marL="0">
+              <a:buNone/>
+            </a:pPr>
+            <a:r>
+              <a:rPr lang="en-US" sz="900" b="1" dirty="0">
+                <a:solidFill>
+                  <a:srgbClr val="9D174D"/>
+                </a:solidFill>
+                <a:latin typeface="Trebuchet MS" pitchFamily="34" charset="0"/>
+                <a:ea typeface="Trebuchet MS" pitchFamily="34" charset="-122"/>
+                <a:cs typeface="Trebuchet MS" pitchFamily="34" charset="-120"/>
+              </a:rPr>
+              <a:t>e</a:t>
+            </a:r>
+            <a:endParaRPr lang="en-US" sz="900" dirty="0"/>
+          </a:p>
+        </p:txBody>
+      </p:sp>
+      <p:sp>
+        <p:nvSpPr>
+          <p:cNvPr id="59" name="Shape 57"/>
+          <p:cNvSpPr/>
+          <p:nvPr/>
+        </p:nvSpPr>
+        <p:spPr>
+          <a:xfrm>
+            <a:off x="7297743" y="4169664"/>
+            <a:ext cx="543652" cy="475488"/>
+          </a:xfrm>
+          <a:prstGeom prst="rect">
+            <a:avLst>
+              <a:gd name="adj" fmla="val 7692"/>
+            </a:avLst>
+          </a:prstGeom>
+          <a:solidFill>
+            <a:srgbClr val="FFFFFF"/>
+          </a:solidFill>
+          <a:ln w="12700">
+            <a:solidFill>
+              <a:srgbClr val="DB2777"/>
+            </a:solidFill>
+            <a:prstDash val="solid"/>
+          </a:ln>
+        </p:spPr>
+      </p:sp>
+      <p:sp>
+        <p:nvSpPr>
+          <p:cNvPr id="60" name="Text 58"/>
+          <p:cNvSpPr/>
+          <p:nvPr/>
+        </p:nvSpPr>
+        <p:spPr>
+          <a:xfrm>
+            <a:off x="7297743" y="4169664"/>
+            <a:ext cx="543652" cy="475488"/>
+          </a:xfrm>
+          <a:prstGeom prst="rect">
+            <a:avLst/>
+          </a:prstGeom>
+          <a:noFill/>
+          <a:ln/>
+        </p:spPr>
+        <p:txBody>
+          <a:bodyPr wrap="square" lIns="0" tIns="0" rIns="0" bIns="0" rtlCol="0" anchor="ctr"/>
+          <a:lstStyle/>
+          <a:p>
+            <a:pPr algn="ctr" indent="0" marL="0">
+              <a:buNone/>
+            </a:pPr>
+            <a:r>
+              <a:rPr lang="en-US" sz="900" b="1" dirty="0">
+                <a:solidFill>
+                  <a:srgbClr val="9D174D"/>
+                </a:solidFill>
+                <a:latin typeface="Trebuchet MS" pitchFamily="34" charset="0"/>
+                <a:ea typeface="Trebuchet MS" pitchFamily="34" charset="-122"/>
+                <a:cs typeface="Trebuchet MS" pitchFamily="34" charset="-120"/>
+              </a:rPr>
               <a:t>n</a:t>
             </a:r>
             <a:endParaRPr lang="en-US" sz="900" dirty="0"/>
@@ -16559,18 +16652,18 @@
       </p:sp>
       <p:sp>
         <p:nvSpPr>
-          <p:cNvPr id="58" name="Shape 56"/>
-          <p:cNvSpPr/>
-          <p:nvPr/>
-        </p:nvSpPr>
-        <p:spPr>
-          <a:xfrm>
-            <a:off x="7759598" y="4169664"/>
-            <a:ext cx="676656" cy="384048"/>
+          <p:cNvPr id="61" name="Shape 59"/>
+          <p:cNvSpPr/>
+          <p:nvPr/>
+        </p:nvSpPr>
+        <p:spPr>
+          <a:xfrm>
+            <a:off x="7891688" y="4169664"/>
+            <a:ext cx="543652" cy="475488"/>
           </a:xfrm>
           <a:prstGeom prst="rect">
             <a:avLst>
-              <a:gd name="adj" fmla="val 9524"/>
+              <a:gd name="adj" fmla="val 7692"/>
             </a:avLst>
           </a:prstGeom>
           <a:solidFill>
@@ -16586,14 +16679,14 @@
       </p:sp>
       <p:sp>
         <p:nvSpPr>
-          <p:cNvPr id="59" name="Text 57"/>
-          <p:cNvSpPr/>
-          <p:nvPr/>
-        </p:nvSpPr>
-        <p:spPr>
-          <a:xfrm>
-            <a:off x="7759598" y="4169664"/>
-            <a:ext cx="676656" cy="384048"/>
+          <p:cNvPr id="62" name="Text 60"/>
+          <p:cNvSpPr/>
+          <p:nvPr/>
+        </p:nvSpPr>
+        <p:spPr>
+          <a:xfrm>
+            <a:off x="7891688" y="4169664"/>
+            <a:ext cx="543652" cy="475488"/>
           </a:xfrm>
           <a:prstGeom prst="rect">
             <a:avLst/>
@@ -39438,7 +39531,7 @@
                 <a:ea typeface="Calibri" pitchFamily="34" charset="-122"/>
                 <a:cs typeface="Calibri" pitchFamily="34" charset="-120"/>
               </a:rPr>
-              <a:t>2.  The suffix '-ment' can turn a verb into a noun (e.g. move → movement).</a:t>
+              <a:t>2.  Adding '-ment' to a word always doubles the final consonant.</a:t>
             </a:r>
             <a:endParaRPr lang="en-US" sz="1300" dirty="0"/>
           </a:p>
@@ -39461,11 +39554,11 @@
             </a:avLst>
           </a:prstGeom>
           <a:solidFill>
-            <a:srgbClr val="DCFCE7"/>
-          </a:solidFill>
-          <a:ln w="12700">
-            <a:solidFill>
-              <a:srgbClr val="16A34A"/>
+            <a:srgbClr val="FEE2E2"/>
+          </a:solidFill>
+          <a:ln w="12700">
+            <a:solidFill>
+              <a:srgbClr val="DC2626"/>
             </a:solidFill>
             <a:prstDash val="solid"/>
           </a:ln>
@@ -39498,13 +39591,13 @@
             <a:r>
               <a:rPr lang="en-US" sz="1100" b="1" dirty="0">
                 <a:solidFill>
-                  <a:srgbClr val="16A34A"/>
+                  <a:srgbClr val="DC2626"/>
                 </a:solidFill>
                 <a:latin typeface="Trebuchet MS" pitchFamily="34" charset="0"/>
                 <a:ea typeface="Trebuchet MS" pitchFamily="34" charset="-122"/>
                 <a:cs typeface="Trebuchet MS" pitchFamily="34" charset="-120"/>
               </a:rPr>
-              <a:t>TRUE</a:t>
+              <a:t>FALSE</a:t>
             </a:r>
             <a:endParaRPr lang="en-US" sz="1100" dirty="0"/>
           </a:p>
@@ -39716,7 +39809,7 @@
                 <a:ea typeface="Calibri" pitchFamily="34" charset="-122"/>
                 <a:cs typeface="Calibri" pitchFamily="34" charset="-120"/>
               </a:rPr>
-              <a:t>4.  The word 'enjoyment' contains the suffix '-ment'.</a:t>
+              <a:t>4.  The suffix '-ment' can turn a verb into a noun (e.g. move → movement).</a:t>
             </a:r>
             <a:endParaRPr lang="en-US" sz="1300" dirty="0"/>
           </a:p>
@@ -39855,7 +39948,7 @@
                 <a:ea typeface="Calibri" pitchFamily="34" charset="-122"/>
                 <a:cs typeface="Calibri" pitchFamily="34" charset="-120"/>
               </a:rPr>
-              <a:t>5.  Adding '-ment' to a word always doubles the final consonant.</a:t>
+              <a:t>5.  The word 'enjoyment' contains the suffix '-ment'.</a:t>
             </a:r>
             <a:endParaRPr lang="en-US" sz="1300" dirty="0"/>
           </a:p>
@@ -39878,11 +39971,11 @@
             </a:avLst>
           </a:prstGeom>
           <a:solidFill>
-            <a:srgbClr val="FEE2E2"/>
-          </a:solidFill>
-          <a:ln w="12700">
-            <a:solidFill>
-              <a:srgbClr val="DC2626"/>
+            <a:srgbClr val="DCFCE7"/>
+          </a:solidFill>
+          <a:ln w="12700">
+            <a:solidFill>
+              <a:srgbClr val="16A34A"/>
             </a:solidFill>
             <a:prstDash val="solid"/>
           </a:ln>
@@ -39915,13 +40008,13 @@
             <a:r>
               <a:rPr lang="en-US" sz="1100" b="1" dirty="0">
                 <a:solidFill>
-                  <a:srgbClr val="DC2626"/>
+                  <a:srgbClr val="16A34A"/>
                 </a:solidFill>
                 <a:latin typeface="Trebuchet MS" pitchFamily="34" charset="0"/>
                 <a:ea typeface="Trebuchet MS" pitchFamily="34" charset="-122"/>
                 <a:cs typeface="Trebuchet MS" pitchFamily="34" charset="-120"/>
               </a:rPr>
-              <a:t>FALSE</a:t>
+              <a:t>TRUE</a:t>
             </a:r>
             <a:endParaRPr lang="en-US" sz="1100" dirty="0"/>
           </a:p>
